--- a/ゲーム科2年/00_前期/ゲーム開発Ⅰ/ゲーム物理学/座学/08_関数と平均速度.pptx
+++ b/ゲーム科2年/00_前期/ゲーム開発Ⅰ/ゲーム物理学/座学/08_関数と平均速度.pptx
@@ -268,7 +268,7 @@
           <a:p>
             <a:fld id="{E9CC885B-4903-4D54-9A93-00025F12DED9}" type="datetimeFigureOut">
               <a:rPr kumimoji="1" lang="ja-JP" altLang="en-US" smtClean="0"/>
-              <a:t>2024/12/16</a:t>
+              <a:t>2025/4/9</a:t>
             </a:fld>
             <a:endParaRPr kumimoji="1" lang="ja-JP" altLang="en-US"/>
           </a:p>
@@ -498,7 +498,7 @@
           <a:p>
             <a:fld id="{E9CC885B-4903-4D54-9A93-00025F12DED9}" type="datetimeFigureOut">
               <a:rPr kumimoji="1" lang="ja-JP" altLang="en-US" smtClean="0"/>
-              <a:t>2024/12/16</a:t>
+              <a:t>2025/4/9</a:t>
             </a:fld>
             <a:endParaRPr kumimoji="1" lang="ja-JP" altLang="en-US"/>
           </a:p>
@@ -738,7 +738,7 @@
           <a:p>
             <a:fld id="{E9CC885B-4903-4D54-9A93-00025F12DED9}" type="datetimeFigureOut">
               <a:rPr kumimoji="1" lang="ja-JP" altLang="en-US" smtClean="0"/>
-              <a:t>2024/12/16</a:t>
+              <a:t>2025/4/9</a:t>
             </a:fld>
             <a:endParaRPr kumimoji="1" lang="ja-JP" altLang="en-US"/>
           </a:p>
@@ -968,7 +968,7 @@
           <a:p>
             <a:fld id="{E9CC885B-4903-4D54-9A93-00025F12DED9}" type="datetimeFigureOut">
               <a:rPr kumimoji="1" lang="ja-JP" altLang="en-US" smtClean="0"/>
-              <a:t>2024/12/16</a:t>
+              <a:t>2025/4/9</a:t>
             </a:fld>
             <a:endParaRPr kumimoji="1" lang="ja-JP" altLang="en-US"/>
           </a:p>
@@ -1243,7 +1243,7 @@
           <a:p>
             <a:fld id="{E9CC885B-4903-4D54-9A93-00025F12DED9}" type="datetimeFigureOut">
               <a:rPr kumimoji="1" lang="ja-JP" altLang="en-US" smtClean="0"/>
-              <a:t>2024/12/16</a:t>
+              <a:t>2025/4/9</a:t>
             </a:fld>
             <a:endParaRPr kumimoji="1" lang="ja-JP" altLang="en-US"/>
           </a:p>
@@ -1572,7 +1572,7 @@
           <a:p>
             <a:fld id="{E9CC885B-4903-4D54-9A93-00025F12DED9}" type="datetimeFigureOut">
               <a:rPr kumimoji="1" lang="ja-JP" altLang="en-US" smtClean="0"/>
-              <a:t>2024/12/16</a:t>
+              <a:t>2025/4/9</a:t>
             </a:fld>
             <a:endParaRPr kumimoji="1" lang="ja-JP" altLang="en-US"/>
           </a:p>
@@ -2048,7 +2048,7 @@
           <a:p>
             <a:fld id="{E9CC885B-4903-4D54-9A93-00025F12DED9}" type="datetimeFigureOut">
               <a:rPr kumimoji="1" lang="ja-JP" altLang="en-US" smtClean="0"/>
-              <a:t>2024/12/16</a:t>
+              <a:t>2025/4/9</a:t>
             </a:fld>
             <a:endParaRPr kumimoji="1" lang="ja-JP" altLang="en-US"/>
           </a:p>
@@ -2189,7 +2189,7 @@
           <a:p>
             <a:fld id="{E9CC885B-4903-4D54-9A93-00025F12DED9}" type="datetimeFigureOut">
               <a:rPr kumimoji="1" lang="ja-JP" altLang="en-US" smtClean="0"/>
-              <a:t>2024/12/16</a:t>
+              <a:t>2025/4/9</a:t>
             </a:fld>
             <a:endParaRPr kumimoji="1" lang="ja-JP" altLang="en-US"/>
           </a:p>
@@ -2302,7 +2302,7 @@
           <a:p>
             <a:fld id="{E9CC885B-4903-4D54-9A93-00025F12DED9}" type="datetimeFigureOut">
               <a:rPr kumimoji="1" lang="ja-JP" altLang="en-US" smtClean="0"/>
-              <a:t>2024/12/16</a:t>
+              <a:t>2025/4/9</a:t>
             </a:fld>
             <a:endParaRPr kumimoji="1" lang="ja-JP" altLang="en-US"/>
           </a:p>
@@ -2645,7 +2645,7 @@
           <a:p>
             <a:fld id="{E9CC885B-4903-4D54-9A93-00025F12DED9}" type="datetimeFigureOut">
               <a:rPr kumimoji="1" lang="ja-JP" altLang="en-US" smtClean="0"/>
-              <a:t>2024/12/16</a:t>
+              <a:t>2025/4/9</a:t>
             </a:fld>
             <a:endParaRPr kumimoji="1" lang="ja-JP" altLang="en-US"/>
           </a:p>
@@ -2933,7 +2933,7 @@
           <a:p>
             <a:fld id="{E9CC885B-4903-4D54-9A93-00025F12DED9}" type="datetimeFigureOut">
               <a:rPr kumimoji="1" lang="ja-JP" altLang="en-US" smtClean="0"/>
-              <a:t>2024/12/16</a:t>
+              <a:t>2025/4/9</a:t>
             </a:fld>
             <a:endParaRPr kumimoji="1" lang="ja-JP" altLang="en-US"/>
           </a:p>
@@ -3206,7 +3206,7 @@
           <a:p>
             <a:fld id="{E9CC885B-4903-4D54-9A93-00025F12DED9}" type="datetimeFigureOut">
               <a:rPr kumimoji="1" lang="ja-JP" altLang="en-US" smtClean="0"/>
-              <a:t>2024/12/16</a:t>
+              <a:t>2025/4/9</a:t>
             </a:fld>
             <a:endParaRPr kumimoji="1" lang="ja-JP" altLang="en-US"/>
           </a:p>
@@ -6217,8 +6217,8 @@
           </a:graphicData>
         </a:graphic>
       </p:graphicFrame>
-      <mc:AlternateContent xmlns:mc="http://schemas.openxmlformats.org/markup-compatibility/2006" xmlns:a14="http://schemas.microsoft.com/office/drawing/2010/main">
-        <mc:Choice Requires="a14">
+      <mc:AlternateContent xmlns:mc="http://schemas.openxmlformats.org/markup-compatibility/2006">
+        <mc:Choice xmlns:a14="http://schemas.microsoft.com/office/drawing/2010/main" Requires="a14">
           <p:sp>
             <p:nvSpPr>
               <p:cNvPr id="5" name="テキスト ボックス 4">
@@ -6264,6 +6264,47 @@
                 </a:r>
                 <a14:m>
                   <m:oMath xmlns:m="http://schemas.openxmlformats.org/officeDocument/2006/math">
+                    <m:r>
+                      <a:rPr lang="en-US" altLang="ja-JP" sz="2400" i="1">
+                        <a:solidFill>
+                          <a:srgbClr val="FF0000"/>
+                        </a:solidFill>
+                        <a:latin typeface="Cambria Math" panose="02040503050406030204" pitchFamily="18" charset="0"/>
+                      </a:rPr>
+                      <m:t>𝑓</m:t>
+                    </m:r>
+                    <m:d>
+                      <m:dPr>
+                        <m:ctrlPr>
+                          <a:rPr lang="en-US" altLang="ja-JP" sz="2400" i="1">
+                            <a:solidFill>
+                              <a:srgbClr val="FF0000"/>
+                            </a:solidFill>
+                            <a:latin typeface="Cambria Math" panose="02040503050406030204" pitchFamily="18" charset="0"/>
+                          </a:rPr>
+                        </m:ctrlPr>
+                      </m:dPr>
+                      <m:e>
+                        <m:r>
+                          <a:rPr lang="en-US" altLang="ja-JP" sz="2400" b="0" i="1" smtClean="0">
+                            <a:solidFill>
+                              <a:srgbClr val="FF0000"/>
+                            </a:solidFill>
+                            <a:latin typeface="Cambria Math" panose="02040503050406030204" pitchFamily="18" charset="0"/>
+                          </a:rPr>
+                          <m:t>𝑡</m:t>
+                        </m:r>
+                      </m:e>
+                    </m:d>
+                    <m:r>
+                      <a:rPr lang="en-US" altLang="ja-JP" sz="2400" b="0" i="1" smtClean="0">
+                        <a:solidFill>
+                          <a:srgbClr val="FF0000"/>
+                        </a:solidFill>
+                        <a:latin typeface="Cambria Math" panose="02040503050406030204" pitchFamily="18" charset="0"/>
+                      </a:rPr>
+                      <m:t>=</m:t>
+                    </m:r>
                     <m:r>
                       <a:rPr lang="en-US" altLang="ja-JP" sz="2400" b="0" i="1" smtClean="0">
                         <a:solidFill>
@@ -6328,7 +6369,48 @@
                 <a14:m>
                   <m:oMath xmlns:m="http://schemas.openxmlformats.org/officeDocument/2006/math">
                     <m:r>
-                      <a:rPr lang="en-US" altLang="ja-JP" sz="2400" b="0" i="1" smtClean="0">
+                      <a:rPr lang="en-US" altLang="ja-JP" sz="2400" i="1">
+                        <a:solidFill>
+                          <a:srgbClr val="FF0000"/>
+                        </a:solidFill>
+                        <a:latin typeface="Cambria Math" panose="02040503050406030204" pitchFamily="18" charset="0"/>
+                      </a:rPr>
+                      <m:t>𝑓</m:t>
+                    </m:r>
+                    <m:d>
+                      <m:dPr>
+                        <m:ctrlPr>
+                          <a:rPr lang="en-US" altLang="ja-JP" sz="2400" i="1">
+                            <a:solidFill>
+                              <a:srgbClr val="FF0000"/>
+                            </a:solidFill>
+                            <a:latin typeface="Cambria Math" panose="02040503050406030204" pitchFamily="18" charset="0"/>
+                          </a:rPr>
+                        </m:ctrlPr>
+                      </m:dPr>
+                      <m:e>
+                        <m:r>
+                          <a:rPr lang="en-US" altLang="ja-JP" sz="2400" i="1">
+                            <a:solidFill>
+                              <a:srgbClr val="FF0000"/>
+                            </a:solidFill>
+                            <a:latin typeface="Cambria Math" panose="02040503050406030204" pitchFamily="18" charset="0"/>
+                          </a:rPr>
+                          <m:t>𝑡</m:t>
+                        </m:r>
+                      </m:e>
+                    </m:d>
+                    <m:r>
+                      <a:rPr lang="en-US" altLang="ja-JP" sz="2400" i="1">
+                        <a:solidFill>
+                          <a:srgbClr val="FF0000"/>
+                        </a:solidFill>
+                        <a:latin typeface="Cambria Math" panose="02040503050406030204" pitchFamily="18" charset="0"/>
+                      </a:rPr>
+                      <m:t>=</m:t>
+                    </m:r>
+                    <m:r>
+                      <a:rPr lang="en-US" altLang="ja-JP" sz="2400" i="1">
                         <a:solidFill>
                           <a:srgbClr val="FF0000"/>
                         </a:solidFill>
@@ -6391,7 +6473,48 @@
                 <a14:m>
                   <m:oMath xmlns:m="http://schemas.openxmlformats.org/officeDocument/2006/math">
                     <m:r>
-                      <a:rPr lang="en-US" altLang="ja-JP" sz="2400" b="0" i="1" smtClean="0">
+                      <a:rPr lang="en-US" altLang="ja-JP" sz="2400" i="1">
+                        <a:solidFill>
+                          <a:srgbClr val="FF0000"/>
+                        </a:solidFill>
+                        <a:latin typeface="Cambria Math" panose="02040503050406030204" pitchFamily="18" charset="0"/>
+                      </a:rPr>
+                      <m:t>𝑓</m:t>
+                    </m:r>
+                    <m:d>
+                      <m:dPr>
+                        <m:ctrlPr>
+                          <a:rPr lang="en-US" altLang="ja-JP" sz="2400" i="1">
+                            <a:solidFill>
+                              <a:srgbClr val="FF0000"/>
+                            </a:solidFill>
+                            <a:latin typeface="Cambria Math" panose="02040503050406030204" pitchFamily="18" charset="0"/>
+                          </a:rPr>
+                        </m:ctrlPr>
+                      </m:dPr>
+                      <m:e>
+                        <m:r>
+                          <a:rPr lang="en-US" altLang="ja-JP" sz="2400" i="1">
+                            <a:solidFill>
+                              <a:srgbClr val="FF0000"/>
+                            </a:solidFill>
+                            <a:latin typeface="Cambria Math" panose="02040503050406030204" pitchFamily="18" charset="0"/>
+                          </a:rPr>
+                          <m:t>𝑡</m:t>
+                        </m:r>
+                      </m:e>
+                    </m:d>
+                    <m:r>
+                      <a:rPr lang="en-US" altLang="ja-JP" sz="2400" i="1">
+                        <a:solidFill>
+                          <a:srgbClr val="FF0000"/>
+                        </a:solidFill>
+                        <a:latin typeface="Cambria Math" panose="02040503050406030204" pitchFamily="18" charset="0"/>
+                      </a:rPr>
+                      <m:t>=</m:t>
+                    </m:r>
+                    <m:r>
+                      <a:rPr lang="en-US" altLang="ja-JP" sz="2400" i="1">
                         <a:solidFill>
                           <a:srgbClr val="FF0000"/>
                         </a:solidFill>
@@ -6470,7 +6593,7 @@
             </p:txBody>
           </p:sp>
         </mc:Choice>
-        <mc:Fallback xmlns="">
+        <mc:Fallback>
           <p:sp>
             <p:nvSpPr>
               <p:cNvPr id="5" name="テキスト ボックス 4">
@@ -10212,8 +10335,8 @@
           </a:graphicData>
         </a:graphic>
       </p:graphicFrame>
-      <mc:AlternateContent xmlns:mc="http://schemas.openxmlformats.org/markup-compatibility/2006">
-        <mc:Choice xmlns:a14="http://schemas.microsoft.com/office/drawing/2010/main" Requires="a14">
+      <mc:AlternateContent xmlns:mc="http://schemas.openxmlformats.org/markup-compatibility/2006" xmlns:a14="http://schemas.microsoft.com/office/drawing/2010/main">
+        <mc:Choice Requires="a14">
           <p:sp>
             <p:nvSpPr>
               <p:cNvPr id="7" name="テキスト ボックス 6">
@@ -10613,7 +10736,7 @@
             </p:txBody>
           </p:sp>
         </mc:Choice>
-        <mc:Fallback>
+        <mc:Fallback xmlns="">
           <p:sp>
             <p:nvSpPr>
               <p:cNvPr id="7" name="テキスト ボックス 6">

--- a/ゲーム科2年/00_前期/ゲーム開発Ⅰ/ゲーム物理学/座学/08_関数と平均速度.pptx
+++ b/ゲーム科2年/00_前期/ゲーム開発Ⅰ/ゲーム物理学/座学/08_関数と平均速度.pptx
@@ -268,7 +268,7 @@
           <a:p>
             <a:fld id="{E9CC885B-4903-4D54-9A93-00025F12DED9}" type="datetimeFigureOut">
               <a:rPr kumimoji="1" lang="ja-JP" altLang="en-US" smtClean="0"/>
-              <a:t>2025/4/9</a:t>
+              <a:t>2025/9/19</a:t>
             </a:fld>
             <a:endParaRPr kumimoji="1" lang="ja-JP" altLang="en-US"/>
           </a:p>
@@ -498,7 +498,7 @@
           <a:p>
             <a:fld id="{E9CC885B-4903-4D54-9A93-00025F12DED9}" type="datetimeFigureOut">
               <a:rPr kumimoji="1" lang="ja-JP" altLang="en-US" smtClean="0"/>
-              <a:t>2025/4/9</a:t>
+              <a:t>2025/9/19</a:t>
             </a:fld>
             <a:endParaRPr kumimoji="1" lang="ja-JP" altLang="en-US"/>
           </a:p>
@@ -738,7 +738,7 @@
           <a:p>
             <a:fld id="{E9CC885B-4903-4D54-9A93-00025F12DED9}" type="datetimeFigureOut">
               <a:rPr kumimoji="1" lang="ja-JP" altLang="en-US" smtClean="0"/>
-              <a:t>2025/4/9</a:t>
+              <a:t>2025/9/19</a:t>
             </a:fld>
             <a:endParaRPr kumimoji="1" lang="ja-JP" altLang="en-US"/>
           </a:p>
@@ -968,7 +968,7 @@
           <a:p>
             <a:fld id="{E9CC885B-4903-4D54-9A93-00025F12DED9}" type="datetimeFigureOut">
               <a:rPr kumimoji="1" lang="ja-JP" altLang="en-US" smtClean="0"/>
-              <a:t>2025/4/9</a:t>
+              <a:t>2025/9/19</a:t>
             </a:fld>
             <a:endParaRPr kumimoji="1" lang="ja-JP" altLang="en-US"/>
           </a:p>
@@ -1243,7 +1243,7 @@
           <a:p>
             <a:fld id="{E9CC885B-4903-4D54-9A93-00025F12DED9}" type="datetimeFigureOut">
               <a:rPr kumimoji="1" lang="ja-JP" altLang="en-US" smtClean="0"/>
-              <a:t>2025/4/9</a:t>
+              <a:t>2025/9/19</a:t>
             </a:fld>
             <a:endParaRPr kumimoji="1" lang="ja-JP" altLang="en-US"/>
           </a:p>
@@ -1572,7 +1572,7 @@
           <a:p>
             <a:fld id="{E9CC885B-4903-4D54-9A93-00025F12DED9}" type="datetimeFigureOut">
               <a:rPr kumimoji="1" lang="ja-JP" altLang="en-US" smtClean="0"/>
-              <a:t>2025/4/9</a:t>
+              <a:t>2025/9/19</a:t>
             </a:fld>
             <a:endParaRPr kumimoji="1" lang="ja-JP" altLang="en-US"/>
           </a:p>
@@ -2048,7 +2048,7 @@
           <a:p>
             <a:fld id="{E9CC885B-4903-4D54-9A93-00025F12DED9}" type="datetimeFigureOut">
               <a:rPr kumimoji="1" lang="ja-JP" altLang="en-US" smtClean="0"/>
-              <a:t>2025/4/9</a:t>
+              <a:t>2025/9/19</a:t>
             </a:fld>
             <a:endParaRPr kumimoji="1" lang="ja-JP" altLang="en-US"/>
           </a:p>
@@ -2189,7 +2189,7 @@
           <a:p>
             <a:fld id="{E9CC885B-4903-4D54-9A93-00025F12DED9}" type="datetimeFigureOut">
               <a:rPr kumimoji="1" lang="ja-JP" altLang="en-US" smtClean="0"/>
-              <a:t>2025/4/9</a:t>
+              <a:t>2025/9/19</a:t>
             </a:fld>
             <a:endParaRPr kumimoji="1" lang="ja-JP" altLang="en-US"/>
           </a:p>
@@ -2302,7 +2302,7 @@
           <a:p>
             <a:fld id="{E9CC885B-4903-4D54-9A93-00025F12DED9}" type="datetimeFigureOut">
               <a:rPr kumimoji="1" lang="ja-JP" altLang="en-US" smtClean="0"/>
-              <a:t>2025/4/9</a:t>
+              <a:t>2025/9/19</a:t>
             </a:fld>
             <a:endParaRPr kumimoji="1" lang="ja-JP" altLang="en-US"/>
           </a:p>
@@ -2645,7 +2645,7 @@
           <a:p>
             <a:fld id="{E9CC885B-4903-4D54-9A93-00025F12DED9}" type="datetimeFigureOut">
               <a:rPr kumimoji="1" lang="ja-JP" altLang="en-US" smtClean="0"/>
-              <a:t>2025/4/9</a:t>
+              <a:t>2025/9/19</a:t>
             </a:fld>
             <a:endParaRPr kumimoji="1" lang="ja-JP" altLang="en-US"/>
           </a:p>
@@ -2933,7 +2933,7 @@
           <a:p>
             <a:fld id="{E9CC885B-4903-4D54-9A93-00025F12DED9}" type="datetimeFigureOut">
               <a:rPr kumimoji="1" lang="ja-JP" altLang="en-US" smtClean="0"/>
-              <a:t>2025/4/9</a:t>
+              <a:t>2025/9/19</a:t>
             </a:fld>
             <a:endParaRPr kumimoji="1" lang="ja-JP" altLang="en-US"/>
           </a:p>
@@ -3206,7 +3206,7 @@
           <a:p>
             <a:fld id="{E9CC885B-4903-4D54-9A93-00025F12DED9}" type="datetimeFigureOut">
               <a:rPr kumimoji="1" lang="ja-JP" altLang="en-US" smtClean="0"/>
-              <a:t>2025/4/9</a:t>
+              <a:t>2025/9/19</a:t>
             </a:fld>
             <a:endParaRPr kumimoji="1" lang="ja-JP" altLang="en-US"/>
           </a:p>
@@ -6234,7 +6234,7 @@
             <p:spPr>
               <a:xfrm>
                 <a:off x="4783942" y="2516479"/>
-                <a:ext cx="5346335" cy="2677656"/>
+                <a:ext cx="5346335" cy="2812886"/>
               </a:xfrm>
               <a:prstGeom prst="rect">
                 <a:avLst/>
@@ -6297,13 +6297,13 @@
                       </m:e>
                     </m:d>
                     <m:r>
-                      <a:rPr lang="en-US" altLang="ja-JP" sz="2400" b="0" i="1" smtClean="0">
+                      <a:rPr lang="ja-JP" altLang="en-US" sz="2400" i="1">
                         <a:solidFill>
                           <a:srgbClr val="FF0000"/>
                         </a:solidFill>
                         <a:latin typeface="Cambria Math" panose="02040503050406030204" pitchFamily="18" charset="0"/>
                       </a:rPr>
-                      <m:t>=</m:t>
+                      <m:t>　</m:t>
                     </m:r>
                     <m:r>
                       <a:rPr lang="en-US" altLang="ja-JP" sz="2400" b="0" i="1" smtClean="0">
@@ -6401,13 +6401,13 @@
                       </m:e>
                     </m:d>
                     <m:r>
-                      <a:rPr lang="en-US" altLang="ja-JP" sz="2400" i="1">
+                      <a:rPr lang="ja-JP" altLang="en-US" sz="2400" i="1">
                         <a:solidFill>
                           <a:srgbClr val="FF0000"/>
                         </a:solidFill>
                         <a:latin typeface="Cambria Math" panose="02040503050406030204" pitchFamily="18" charset="0"/>
                       </a:rPr>
-                      <m:t>=</m:t>
+                      <m:t>　</m:t>
                     </m:r>
                     <m:r>
                       <a:rPr lang="en-US" altLang="ja-JP" sz="2400" i="1">
@@ -6505,13 +6505,13 @@
                       </m:e>
                     </m:d>
                     <m:r>
-                      <a:rPr lang="en-US" altLang="ja-JP" sz="2400" i="1">
+                      <a:rPr lang="ja-JP" altLang="en-US" sz="2400" i="1">
                         <a:solidFill>
                           <a:srgbClr val="FF0000"/>
                         </a:solidFill>
                         <a:latin typeface="Cambria Math" panose="02040503050406030204" pitchFamily="18" charset="0"/>
                       </a:rPr>
-                      <m:t>=</m:t>
+                      <m:t>　</m:t>
                     </m:r>
                     <m:r>
                       <a:rPr lang="en-US" altLang="ja-JP" sz="2400" i="1">
@@ -6611,7 +6611,7 @@
             <p:spPr>
               <a:xfrm>
                 <a:off x="4783942" y="2516479"/>
-                <a:ext cx="5346335" cy="2677656"/>
+                <a:ext cx="5346335" cy="2812886"/>
               </a:xfrm>
               <a:prstGeom prst="rect">
                 <a:avLst/>
@@ -6619,7 +6619,7 @@
               <a:blipFill>
                 <a:blip r:embed="rId2"/>
                 <a:stretch>
-                  <a:fillRect l="-1824" t="-1822" r="-684" b="-4328"/>
+                  <a:fillRect l="-1824" t="-1735" r="-684" b="-4121"/>
                 </a:stretch>
               </a:blipFill>
             </p:spPr>
